--- a/slides/AI in Journalism-4.pptx
+++ b/slides/AI in Journalism-4.pptx
@@ -229,7 +229,7 @@
           <a:p>
             <a:fld id="{D584BE07-979B-4FA0-9B38-E292101A23E7}" type="datetimeFigureOut">
               <a:rPr lang="fa-IR" smtClean="0"/>
-              <a:t>22/04/1447</a:t>
+              <a:t>26/04/1447</a:t>
             </a:fld>
             <a:endParaRPr lang="fa-IR"/>
           </a:p>
@@ -5569,29 +5569,15 @@
                   <a:srgbClr val="164193"/>
                 </a:solidFill>
               </a:rPr>
-              <a:t>جلسه چهارم: قوانین و اخلاق در هوش مصنوعی</a:t>
-            </a:r>
-            <a:br>
-              <a:rPr lang="fa-IR" sz="5400" dirty="0">
+              <a:t>جلسه چهارم: قوانین و اخلاق در </a:t>
+            </a:r>
+            <a:r>
+              <a:rPr lang="fa-IR" sz="5400">
                 <a:solidFill>
                   <a:srgbClr val="164193"/>
                 </a:solidFill>
               </a:rPr>
-            </a:br>
-            <a:br>
-              <a:rPr lang="fa-IR" sz="5400" dirty="0">
-                <a:solidFill>
-                  <a:srgbClr val="164193"/>
-                </a:solidFill>
-              </a:rPr>
-            </a:br>
-            <a:r>
-              <a:rPr lang="fa-IR" sz="4400" dirty="0">
-                <a:solidFill>
-                  <a:srgbClr val="164193"/>
-                </a:solidFill>
-              </a:rPr>
-              <a:t>(جلسه چهارم)</a:t>
+              <a:t>هوش مصنوعی</a:t>
             </a:r>
             <a:endParaRPr lang="fa-IR" sz="5400" dirty="0">
               <a:solidFill>
